--- a/Metodologia Scrum/Mapa mental SOC.pptx
+++ b/Metodologia Scrum/Mapa mental SOC.pptx
@@ -7,7 +7,7 @@
   <p:sldIdLst>
     <p:sldId id="256" r:id="rId2"/>
   </p:sldIdLst>
-  <p:sldSz cx="9144000" cy="6858000" type="screen4x3"/>
+  <p:sldSz cx="12192000" cy="6858000"/>
   <p:notesSz cx="6858000" cy="9144000"/>
   <p:defaultTextStyle>
     <a:defPPr>
@@ -107,12 +107,12 @@
   <p:extLst>
     <p:ext uri="{EFAFB233-063F-42B5-8137-9DF3F51BA10A}">
       <p15:sldGuideLst xmlns:p15="http://schemas.microsoft.com/office/powerpoint/2012/main">
-        <p15:guide id="1" orient="horz" pos="2160">
+        <p15:guide id="1" orient="horz" pos="2160" userDrawn="1">
           <p15:clr>
             <a:srgbClr val="A4A3A4"/>
           </p15:clr>
         </p15:guide>
-        <p15:guide id="2" pos="2880">
+        <p15:guide id="2" pos="3840" userDrawn="1">
           <p15:clr>
             <a:srgbClr val="A4A3A4"/>
           </p15:clr>
@@ -152,8 +152,8 @@
         </p:nvSpPr>
         <p:spPr>
           <a:xfrm>
-            <a:off x="685800" y="2130425"/>
-            <a:ext cx="7772400" cy="1470025"/>
+            <a:off x="914400" y="2130426"/>
+            <a:ext cx="10363200" cy="1470025"/>
           </a:xfrm>
         </p:spPr>
         <p:txBody>
@@ -179,8 +179,8 @@
         </p:nvSpPr>
         <p:spPr>
           <a:xfrm>
-            <a:off x="1371600" y="3886200"/>
-            <a:ext cx="6400800" cy="1752600"/>
+            <a:off x="1828800" y="3886200"/>
+            <a:ext cx="8534400" cy="1752600"/>
           </a:xfrm>
         </p:spPr>
         <p:txBody>
@@ -302,7 +302,7 @@
           <a:p>
             <a:fld id="{5BCAD085-E8A6-8845-BD4E-CB4CCA059FC4}" type="datetimeFigureOut">
               <a:rPr lang="en-US" smtClean="0"/>
-              <a:t>10/11/2025</a:t>
+              <a:t>10/12/2025</a:t>
             </a:fld>
             <a:endParaRPr lang="en-US"/>
           </a:p>
@@ -470,7 +470,7 @@
           <a:p>
             <a:fld id="{5BCAD085-E8A6-8845-BD4E-CB4CCA059FC4}" type="datetimeFigureOut">
               <a:rPr lang="en-US" smtClean="0"/>
-              <a:t>10/11/2025</a:t>
+              <a:t>10/12/2025</a:t>
             </a:fld>
             <a:endParaRPr lang="en-US"/>
           </a:p>
@@ -560,8 +560,8 @@
         </p:nvSpPr>
         <p:spPr>
           <a:xfrm>
-            <a:off x="6629400" y="274638"/>
-            <a:ext cx="2057400" cy="5851525"/>
+            <a:off x="8839200" y="274639"/>
+            <a:ext cx="2743200" cy="5851525"/>
           </a:xfrm>
         </p:spPr>
         <p:txBody>
@@ -587,8 +587,8 @@
         </p:nvSpPr>
         <p:spPr>
           <a:xfrm>
-            <a:off x="457200" y="274638"/>
-            <a:ext cx="6019800" cy="5851525"/>
+            <a:off x="609600" y="274639"/>
+            <a:ext cx="8026400" cy="5851525"/>
           </a:xfrm>
         </p:spPr>
         <p:txBody>
@@ -648,7 +648,7 @@
           <a:p>
             <a:fld id="{5BCAD085-E8A6-8845-BD4E-CB4CCA059FC4}" type="datetimeFigureOut">
               <a:rPr lang="en-US" smtClean="0"/>
-              <a:t>10/11/2025</a:t>
+              <a:t>10/12/2025</a:t>
             </a:fld>
             <a:endParaRPr lang="en-US"/>
           </a:p>
@@ -816,7 +816,7 @@
           <a:p>
             <a:fld id="{5BCAD085-E8A6-8845-BD4E-CB4CCA059FC4}" type="datetimeFigureOut">
               <a:rPr lang="en-US" smtClean="0"/>
-              <a:t>10/11/2025</a:t>
+              <a:t>10/12/2025</a:t>
             </a:fld>
             <a:endParaRPr lang="en-US"/>
           </a:p>
@@ -906,8 +906,8 @@
         </p:nvSpPr>
         <p:spPr>
           <a:xfrm>
-            <a:off x="722313" y="4406900"/>
-            <a:ext cx="7772400" cy="1362075"/>
+            <a:off x="963084" y="4406901"/>
+            <a:ext cx="10363200" cy="1362075"/>
           </a:xfrm>
         </p:spPr>
         <p:txBody>
@@ -937,8 +937,8 @@
         </p:nvSpPr>
         <p:spPr>
           <a:xfrm>
-            <a:off x="722313" y="2906713"/>
-            <a:ext cx="7772400" cy="1500187"/>
+            <a:off x="963084" y="2906713"/>
+            <a:ext cx="10363200" cy="1500187"/>
           </a:xfrm>
         </p:spPr>
         <p:txBody>
@@ -1061,7 +1061,7 @@
           <a:p>
             <a:fld id="{5BCAD085-E8A6-8845-BD4E-CB4CCA059FC4}" type="datetimeFigureOut">
               <a:rPr lang="en-US" smtClean="0"/>
-              <a:t>10/11/2025</a:t>
+              <a:t>10/12/2025</a:t>
             </a:fld>
             <a:endParaRPr lang="en-US"/>
           </a:p>
@@ -1173,8 +1173,8 @@
         </p:nvSpPr>
         <p:spPr>
           <a:xfrm>
-            <a:off x="457200" y="1600200"/>
-            <a:ext cx="4038600" cy="4525963"/>
+            <a:off x="609600" y="1600201"/>
+            <a:ext cx="5384800" cy="4525963"/>
           </a:xfrm>
         </p:spPr>
         <p:txBody>
@@ -1257,8 +1257,8 @@
         </p:nvSpPr>
         <p:spPr>
           <a:xfrm>
-            <a:off x="4648200" y="1600200"/>
-            <a:ext cx="4038600" cy="4525963"/>
+            <a:off x="6197600" y="1600201"/>
+            <a:ext cx="5384800" cy="4525963"/>
           </a:xfrm>
         </p:spPr>
         <p:txBody>
@@ -1346,7 +1346,7 @@
           <a:p>
             <a:fld id="{5BCAD085-E8A6-8845-BD4E-CB4CCA059FC4}" type="datetimeFigureOut">
               <a:rPr lang="en-US" smtClean="0"/>
-              <a:t>10/11/2025</a:t>
+              <a:t>10/12/2025</a:t>
             </a:fld>
             <a:endParaRPr lang="en-US"/>
           </a:p>
@@ -1462,8 +1462,8 @@
         </p:nvSpPr>
         <p:spPr>
           <a:xfrm>
-            <a:off x="457200" y="1535113"/>
-            <a:ext cx="4040188" cy="639762"/>
+            <a:off x="609600" y="1535113"/>
+            <a:ext cx="5386917" cy="639762"/>
           </a:xfrm>
         </p:spPr>
         <p:txBody>
@@ -1527,8 +1527,8 @@
         </p:nvSpPr>
         <p:spPr>
           <a:xfrm>
-            <a:off x="457200" y="2174875"/>
-            <a:ext cx="4040188" cy="3951288"/>
+            <a:off x="609600" y="2174875"/>
+            <a:ext cx="5386917" cy="3951288"/>
           </a:xfrm>
         </p:spPr>
         <p:txBody>
@@ -1611,8 +1611,8 @@
         </p:nvSpPr>
         <p:spPr>
           <a:xfrm>
-            <a:off x="4645025" y="1535113"/>
-            <a:ext cx="4041775" cy="639762"/>
+            <a:off x="6193368" y="1535113"/>
+            <a:ext cx="5389033" cy="639762"/>
           </a:xfrm>
         </p:spPr>
         <p:txBody>
@@ -1676,8 +1676,8 @@
         </p:nvSpPr>
         <p:spPr>
           <a:xfrm>
-            <a:off x="4645025" y="2174875"/>
-            <a:ext cx="4041775" cy="3951288"/>
+            <a:off x="6193368" y="2174875"/>
+            <a:ext cx="5389033" cy="3951288"/>
           </a:xfrm>
         </p:spPr>
         <p:txBody>
@@ -1765,7 +1765,7 @@
           <a:p>
             <a:fld id="{5BCAD085-E8A6-8845-BD4E-CB4CCA059FC4}" type="datetimeFigureOut">
               <a:rPr lang="en-US" smtClean="0"/>
-              <a:t>10/11/2025</a:t>
+              <a:t>10/12/2025</a:t>
             </a:fld>
             <a:endParaRPr lang="en-US"/>
           </a:p>
@@ -1882,7 +1882,7 @@
           <a:p>
             <a:fld id="{5BCAD085-E8A6-8845-BD4E-CB4CCA059FC4}" type="datetimeFigureOut">
               <a:rPr lang="en-US" smtClean="0"/>
-              <a:t>10/11/2025</a:t>
+              <a:t>10/12/2025</a:t>
             </a:fld>
             <a:endParaRPr lang="en-US"/>
           </a:p>
@@ -1977,7 +1977,7 @@
           <a:p>
             <a:fld id="{5BCAD085-E8A6-8845-BD4E-CB4CCA059FC4}" type="datetimeFigureOut">
               <a:rPr lang="en-US" smtClean="0"/>
-              <a:t>10/11/2025</a:t>
+              <a:t>10/12/2025</a:t>
             </a:fld>
             <a:endParaRPr lang="en-US"/>
           </a:p>
@@ -2067,8 +2067,8 @@
         </p:nvSpPr>
         <p:spPr>
           <a:xfrm>
-            <a:off x="457200" y="273050"/>
-            <a:ext cx="3008313" cy="1162050"/>
+            <a:off x="609601" y="273050"/>
+            <a:ext cx="4011084" cy="1162050"/>
           </a:xfrm>
         </p:spPr>
         <p:txBody>
@@ -2098,8 +2098,8 @@
         </p:nvSpPr>
         <p:spPr>
           <a:xfrm>
-            <a:off x="3575050" y="273050"/>
-            <a:ext cx="5111750" cy="5853113"/>
+            <a:off x="4766733" y="273051"/>
+            <a:ext cx="6815667" cy="5853113"/>
           </a:xfrm>
         </p:spPr>
         <p:txBody>
@@ -2182,8 +2182,8 @@
         </p:nvSpPr>
         <p:spPr>
           <a:xfrm>
-            <a:off x="457200" y="1435100"/>
-            <a:ext cx="3008313" cy="4691063"/>
+            <a:off x="609601" y="1435101"/>
+            <a:ext cx="4011084" cy="4691063"/>
           </a:xfrm>
         </p:spPr>
         <p:txBody>
@@ -2252,7 +2252,7 @@
           <a:p>
             <a:fld id="{5BCAD085-E8A6-8845-BD4E-CB4CCA059FC4}" type="datetimeFigureOut">
               <a:rPr lang="en-US" smtClean="0"/>
-              <a:t>10/11/2025</a:t>
+              <a:t>10/12/2025</a:t>
             </a:fld>
             <a:endParaRPr lang="en-US"/>
           </a:p>
@@ -2342,8 +2342,8 @@
         </p:nvSpPr>
         <p:spPr>
           <a:xfrm>
-            <a:off x="1792288" y="4800600"/>
-            <a:ext cx="5486400" cy="566738"/>
+            <a:off x="2389717" y="4800600"/>
+            <a:ext cx="7315200" cy="566738"/>
           </a:xfrm>
         </p:spPr>
         <p:txBody>
@@ -2373,8 +2373,8 @@
         </p:nvSpPr>
         <p:spPr>
           <a:xfrm>
-            <a:off x="1792288" y="612775"/>
-            <a:ext cx="5486400" cy="4114800"/>
+            <a:off x="2389717" y="612775"/>
+            <a:ext cx="7315200" cy="4114800"/>
           </a:xfrm>
         </p:spPr>
         <p:txBody>
@@ -2434,8 +2434,8 @@
         </p:nvSpPr>
         <p:spPr>
           <a:xfrm>
-            <a:off x="1792288" y="5367338"/>
-            <a:ext cx="5486400" cy="804862"/>
+            <a:off x="2389717" y="5367338"/>
+            <a:ext cx="7315200" cy="804862"/>
           </a:xfrm>
         </p:spPr>
         <p:txBody>
@@ -2504,7 +2504,7 @@
           <a:p>
             <a:fld id="{5BCAD085-E8A6-8845-BD4E-CB4CCA059FC4}" type="datetimeFigureOut">
               <a:rPr lang="en-US" smtClean="0"/>
-              <a:t>10/11/2025</a:t>
+              <a:t>10/12/2025</a:t>
             </a:fld>
             <a:endParaRPr lang="en-US"/>
           </a:p>
@@ -2599,8 +2599,8 @@
         </p:nvSpPr>
         <p:spPr>
           <a:xfrm>
-            <a:off x="457200" y="274638"/>
-            <a:ext cx="8229600" cy="1143000"/>
+            <a:off x="609600" y="274638"/>
+            <a:ext cx="10972800" cy="1143000"/>
           </a:xfrm>
           <a:prstGeom prst="rect">
             <a:avLst/>
@@ -2631,8 +2631,8 @@
         </p:nvSpPr>
         <p:spPr>
           <a:xfrm>
-            <a:off x="457200" y="1600200"/>
-            <a:ext cx="8229600" cy="4525963"/>
+            <a:off x="609600" y="1600201"/>
+            <a:ext cx="10972800" cy="4525963"/>
           </a:xfrm>
           <a:prstGeom prst="rect">
             <a:avLst/>
@@ -2692,8 +2692,8 @@
         </p:nvSpPr>
         <p:spPr>
           <a:xfrm>
-            <a:off x="457200" y="6356350"/>
-            <a:ext cx="2133600" cy="365125"/>
+            <a:off x="609600" y="6356351"/>
+            <a:ext cx="2844800" cy="365125"/>
           </a:xfrm>
           <a:prstGeom prst="rect">
             <a:avLst/>
@@ -2715,7 +2715,7 @@
           <a:p>
             <a:fld id="{5BCAD085-E8A6-8845-BD4E-CB4CCA059FC4}" type="datetimeFigureOut">
               <a:rPr lang="en-US" smtClean="0"/>
-              <a:t>10/11/2025</a:t>
+              <a:t>10/12/2025</a:t>
             </a:fld>
             <a:endParaRPr lang="en-US"/>
           </a:p>
@@ -2733,8 +2733,8 @@
         </p:nvSpPr>
         <p:spPr>
           <a:xfrm>
-            <a:off x="3124200" y="6356350"/>
-            <a:ext cx="2895600" cy="365125"/>
+            <a:off x="4165600" y="6356351"/>
+            <a:ext cx="3860800" cy="365125"/>
           </a:xfrm>
           <a:prstGeom prst="rect">
             <a:avLst/>
@@ -2770,8 +2770,8 @@
         </p:nvSpPr>
         <p:spPr>
           <a:xfrm>
-            <a:off x="6553200" y="6356350"/>
-            <a:ext cx="2133600" cy="365125"/>
+            <a:off x="8737600" y="6356351"/>
+            <a:ext cx="2844800" cy="365125"/>
           </a:xfrm>
           <a:prstGeom prst="rect">
             <a:avLst/>
@@ -3098,7 +3098,7 @@
         </p:nvSpPr>
         <p:spPr>
           <a:xfrm>
-            <a:off x="640080" y="274320"/>
+            <a:off x="2164081" y="274320"/>
             <a:ext cx="4424545" cy="523220"/>
           </a:xfrm>
           <a:prstGeom prst="rect">
@@ -3113,7 +3113,7 @@
           <a:lstStyle/>
           <a:p>
             <a:r>
-              <a:rPr sz="2800" b="1" dirty="0"/>
+              <a:rPr sz="2800" b="1" u="sng" dirty="0"/>
               <a:t>Mapa mental  Proyecto SOC </a:t>
             </a:r>
           </a:p>
@@ -3127,7 +3127,7 @@
         </p:nvSpPr>
         <p:spPr>
           <a:xfrm>
-            <a:off x="3443140" y="3063240"/>
+            <a:off x="4967140" y="3063240"/>
             <a:ext cx="2486320" cy="914400"/>
           </a:xfrm>
           <a:prstGeom prst="roundRect">
@@ -3205,7 +3205,7 @@
         </p:nvSpPr>
         <p:spPr>
           <a:xfrm>
-            <a:off x="209312" y="1430046"/>
+            <a:off x="1733312" y="1430046"/>
             <a:ext cx="2643040" cy="1118490"/>
           </a:xfrm>
           <a:prstGeom prst="roundRect">
@@ -3306,7 +3306,7 @@
         </p:nvCxnSpPr>
         <p:spPr>
           <a:xfrm flipH="1" flipV="1">
-            <a:off x="2852352" y="1989291"/>
+            <a:off x="4376352" y="1989292"/>
             <a:ext cx="590788" cy="1531149"/>
           </a:xfrm>
           <a:prstGeom prst="line">
@@ -3341,7 +3341,7 @@
         </p:nvSpPr>
         <p:spPr>
           <a:xfrm>
-            <a:off x="114300" y="3751397"/>
+            <a:off x="1638300" y="3751397"/>
             <a:ext cx="2263140" cy="1273090"/>
           </a:xfrm>
           <a:prstGeom prst="ellipse">
@@ -3376,7 +3376,7 @@
           <a:p>
             <a:pPr algn="ctr"/>
             <a:r>
-              <a:rPr sz="1800" b="1" dirty="0" err="1">
+              <a:rPr b="1" dirty="0" err="1">
                 <a:solidFill>
                   <a:srgbClr val="FFFFFF"/>
                 </a:solidFill>
@@ -3426,7 +3426,7 @@
         </p:nvCxnSpPr>
         <p:spPr>
           <a:xfrm flipH="1">
-            <a:off x="1245870" y="3520440"/>
+            <a:off x="2769870" y="3520441"/>
             <a:ext cx="2197270" cy="230957"/>
           </a:xfrm>
           <a:prstGeom prst="line">
@@ -3461,7 +3461,7 @@
         </p:nvSpPr>
         <p:spPr>
           <a:xfrm>
-            <a:off x="1534330" y="5148417"/>
+            <a:off x="3058330" y="5148417"/>
             <a:ext cx="2263140" cy="1273090"/>
           </a:xfrm>
           <a:prstGeom prst="hexagon">
@@ -3550,7 +3550,7 @@
         </p:nvCxnSpPr>
         <p:spPr>
           <a:xfrm flipH="1">
-            <a:off x="3479198" y="3977640"/>
+            <a:off x="5003198" y="3977641"/>
             <a:ext cx="1207102" cy="1170777"/>
           </a:xfrm>
           <a:prstGeom prst="line">
@@ -3585,7 +3585,7 @@
         </p:nvSpPr>
         <p:spPr>
           <a:xfrm>
-            <a:off x="4241885" y="5249535"/>
+            <a:off x="5765885" y="5249535"/>
             <a:ext cx="2834640" cy="1463040"/>
           </a:xfrm>
           <a:prstGeom prst="diamond">
@@ -3682,7 +3682,7 @@
         </p:nvCxnSpPr>
         <p:spPr>
           <a:xfrm>
-            <a:off x="4686300" y="3977640"/>
+            <a:off x="6210301" y="3977641"/>
             <a:ext cx="972905" cy="1271895"/>
           </a:xfrm>
           <a:prstGeom prst="line">
@@ -3717,7 +3717,7 @@
         </p:nvSpPr>
         <p:spPr>
           <a:xfrm>
-            <a:off x="6543378" y="3977640"/>
+            <a:off x="8067379" y="3977640"/>
             <a:ext cx="2486321" cy="1371600"/>
           </a:xfrm>
           <a:prstGeom prst="parallelogram">
@@ -3839,7 +3839,7 @@
         </p:nvCxnSpPr>
         <p:spPr>
           <a:xfrm>
-            <a:off x="5929460" y="3520440"/>
+            <a:off x="7453461" y="3520440"/>
             <a:ext cx="1857079" cy="457200"/>
           </a:xfrm>
           <a:prstGeom prst="line">
@@ -3874,7 +3874,7 @@
         </p:nvSpPr>
         <p:spPr>
           <a:xfrm>
-            <a:off x="6103620" y="1588669"/>
+            <a:off x="7627620" y="1588669"/>
             <a:ext cx="3017520" cy="1371600"/>
           </a:xfrm>
           <a:prstGeom prst="cloud">
@@ -3909,7 +3909,7 @@
           <a:p>
             <a:pPr algn="ctr"/>
             <a:r>
-              <a:rPr sz="1800" b="1">
+              <a:rPr b="1">
                 <a:solidFill>
                   <a:srgbClr val="FFFFFF"/>
                 </a:solidFill>
@@ -3926,10 +3926,14 @@
               </a:defRPr>
             </a:pPr>
             <a:r>
+              <a:rPr sz="1200"/>
               <a:t>Levantamiento</a:t>
             </a:r>
-            <a:br/>
-            <a:r>
+            <a:br>
+              <a:rPr sz="1200"/>
+            </a:br>
+            <a:r>
+              <a:rPr sz="1200"/>
               <a:t>Pagos/tecnología</a:t>
             </a:r>
           </a:p>
@@ -3947,7 +3951,7 @@
         </p:nvCxnSpPr>
         <p:spPr>
           <a:xfrm flipV="1">
-            <a:off x="5929460" y="2958809"/>
+            <a:off x="7453460" y="2958810"/>
             <a:ext cx="1682920" cy="561631"/>
           </a:xfrm>
           <a:prstGeom prst="line">
@@ -3982,7 +3986,7 @@
         </p:nvSpPr>
         <p:spPr>
           <a:xfrm>
-            <a:off x="3154680" y="982777"/>
+            <a:off x="4678680" y="982777"/>
             <a:ext cx="2834640" cy="1371600"/>
           </a:xfrm>
           <a:prstGeom prst="bevel">
@@ -4017,14 +4021,14 @@
           <a:p>
             <a:pPr algn="ctr"/>
             <a:r>
-              <a:rPr sz="1800" b="1" dirty="0" err="1">
+              <a:rPr b="1" dirty="0" err="1">
                 <a:solidFill>
                   <a:srgbClr val="FFFFFF"/>
                 </a:solidFill>
               </a:rPr>
               <a:t>Indicadores</a:t>
             </a:r>
-            <a:endParaRPr sz="1800" b="1" dirty="0">
+            <a:endParaRPr b="1" dirty="0">
               <a:solidFill>
                 <a:srgbClr val="FFFFFF"/>
               </a:solidFill>
@@ -4039,33 +4043,33 @@
               </a:defRPr>
             </a:pPr>
             <a:r>
-              <a:rPr dirty="0" err="1"/>
+              <a:rPr sz="1200" dirty="0" err="1"/>
               <a:t>Cobros</a:t>
             </a:r>
             <a:r>
-              <a:rPr dirty="0"/>
+              <a:rPr sz="1200" dirty="0"/>
               <a:t> </a:t>
             </a:r>
             <a:r>
-              <a:rPr dirty="0" err="1"/>
+              <a:rPr sz="1200" dirty="0" err="1"/>
               <a:t>completos</a:t>
             </a:r>
             <a:br>
-              <a:rPr dirty="0"/>
+              <a:rPr sz="1200" dirty="0"/>
             </a:br>
             <a:r>
-              <a:rPr dirty="0" err="1"/>
+              <a:rPr sz="1200" dirty="0" err="1"/>
               <a:t>Satisfacción</a:t>
             </a:r>
             <a:r>
-              <a:rPr dirty="0"/>
+              <a:rPr sz="1200" dirty="0"/>
               <a:t> </a:t>
             </a:r>
             <a:r>
-              <a:rPr dirty="0" err="1"/>
+              <a:rPr sz="1200" dirty="0" err="1"/>
               <a:t>usuarios</a:t>
             </a:r>
-            <a:endParaRPr dirty="0"/>
+            <a:endParaRPr sz="1200" dirty="0"/>
           </a:p>
         </p:txBody>
       </p:sp>
@@ -4081,7 +4085,7 @@
         </p:nvCxnSpPr>
         <p:spPr>
           <a:xfrm flipH="1" flipV="1">
-            <a:off x="4572000" y="2354377"/>
+            <a:off x="6096000" y="2354378"/>
             <a:ext cx="114300" cy="708863"/>
           </a:xfrm>
           <a:prstGeom prst="line">
@@ -4130,7 +4134,7 @@
         </p:blipFill>
         <p:spPr>
           <a:xfrm>
-            <a:off x="7245459" y="225334"/>
+            <a:off x="10117492" y="274320"/>
             <a:ext cx="1784240" cy="437198"/>
           </a:xfrm>
           <a:prstGeom prst="rect">
